--- a/docs/presentations/GitHub_AI_Appendix.pptx
+++ b/docs/presentations/GitHub_AI_Appendix.pptx
@@ -1287,319 +1287,6 @@
 </p:sld>
 </file>
 
-<file path=ppt/slides/slide16.xml><?xml version="1.0" encoding="utf-8"?>
-<p:sld xmlns:a="http://schemas.openxmlformats.org/drawingml/2006/main" xmlns:r="http://schemas.openxmlformats.org/officeDocument/2006/relationships" xmlns:p="http://schemas.openxmlformats.org/presentationml/2006/main">
-  <p:cSld name="Slide 1">
-    <p:bg>
-      <p:bgPr>
-        <a:solidFill>
-          <a:srgbClr val="1E2530"/>
-        </a:solidFill>
-        <a:effectLst/>
-      </p:bgPr>
-    </p:bg>
-    <p:spTree>
-      <p:nvGrpSpPr>
-        <p:cNvPr id="1" name=""/>
-        <p:cNvGrpSpPr/>
-        <p:nvPr/>
-      </p:nvGrpSpPr>
-      <p:grpSpPr>
-        <a:xfrm>
-          <a:off x="0" y="0"/>
-          <a:ext cx="0" cy="0"/>
-          <a:chOff x="0" y="0"/>
-          <a:chExt cx="0" cy="0"/>
-        </a:xfrm>
-      </p:grpSpPr>
-      <p:sp>
-        <p:nvSpPr>
-          <p:cNvPr id="2" name="Shape 0"/>
-          <p:cNvSpPr/>
-          <p:nvPr/>
-        </p:nvSpPr>
-        <p:spPr>
-          <a:xfrm>
-            <a:off x="0" y="0"/>
-            <a:ext cx="9144000" cy="36576"/>
-          </a:xfrm>
-          <a:prstGeom prst="rect">
-            <a:avLst/>
-          </a:prstGeom>
-          <a:solidFill>
-            <a:srgbClr val="B8975C"/>
-          </a:solidFill>
-          <a:ln/>
-        </p:spPr>
-        <p:txBody>
-          <a:bodyPr/>
-          <a:lstStyle/>
-          <a:p>
-            <a:endParaRPr lang="en-US"/>
-          </a:p>
-        </p:txBody>
-      </p:sp>
-      <p:sp>
-        <p:nvSpPr>
-          <p:cNvPr id="3" name="Text 1"/>
-          <p:cNvSpPr/>
-          <p:nvPr/>
-        </p:nvSpPr>
-        <p:spPr>
-          <a:xfrm>
-            <a:off x="731520" y="548640"/>
-            <a:ext cx="7680960" cy="365760"/>
-          </a:xfrm>
-          <a:prstGeom prst="rect">
-            <a:avLst/>
-          </a:prstGeom>
-          <a:noFill/>
-          <a:ln/>
-        </p:spPr>
-        <p:txBody>
-          <a:bodyPr wrap="square" lIns="0" tIns="0" rIns="0" bIns="0" rtlCol="0" anchor="ctr"/>
-          <a:lstStyle/>
-          <a:p>
-            <a:pPr marL="0" indent="0">
-              <a:buNone/>
-            </a:pPr>
-            <a:r>
-              <a:rPr lang="en-US" sz="1400" b="1" kern="0" spc="600" dirty="0">
-                <a:solidFill>
-                  <a:srgbClr val="B8975C"/>
-                </a:solidFill>
-                <a:latin typeface="Open Sans" pitchFamily="34" charset="0"/>
-                <a:ea typeface="Open Sans" pitchFamily="34" charset="-122"/>
-                <a:cs typeface="Open Sans" pitchFamily="34" charset="-120"/>
-              </a:rPr>
-              <a:t>STEP 4 OF 4</a:t>
-            </a:r>
-            <a:endParaRPr lang="en-US" sz="1400" dirty="0"/>
-          </a:p>
-        </p:txBody>
-      </p:sp>
-      <p:sp>
-        <p:nvSpPr>
-          <p:cNvPr id="4" name="Text 2"/>
-          <p:cNvSpPr/>
-          <p:nvPr/>
-        </p:nvSpPr>
-        <p:spPr>
-          <a:xfrm>
-            <a:off x="731520" y="1097280"/>
-            <a:ext cx="7680960" cy="1828800"/>
-          </a:xfrm>
-          <a:prstGeom prst="rect">
-            <a:avLst/>
-          </a:prstGeom>
-          <a:noFill/>
-          <a:ln/>
-        </p:spPr>
-        <p:txBody>
-          <a:bodyPr wrap="square" lIns="0" tIns="0" rIns="0" bIns="0" rtlCol="0" anchor="ctr"/>
-          <a:lstStyle/>
-          <a:p>
-            <a:pPr marL="0" indent="0">
-              <a:lnSpc>
-                <a:spcPct val="110000"/>
-              </a:lnSpc>
-              <a:buNone/>
-            </a:pPr>
-            <a:r>
-              <a:rPr lang="en-US" sz="4000" b="1" dirty="0">
-                <a:solidFill>
-                  <a:srgbClr val="FFFFFF"/>
-                </a:solidFill>
-                <a:latin typeface="Open Sans" pitchFamily="34" charset="0"/>
-                <a:ea typeface="Open Sans" pitchFamily="34" charset="-122"/>
-                <a:cs typeface="Open Sans" pitchFamily="34" charset="-120"/>
-              </a:rPr>
-              <a:t>GitHub setup</a:t>
-            </a:r>
-            <a:endParaRPr lang="en-US" sz="4000" dirty="0"/>
-          </a:p>
-          <a:p>
-            <a:pPr marL="0" indent="0">
-              <a:lnSpc>
-                <a:spcPct val="110000"/>
-              </a:lnSpc>
-              <a:buNone/>
-            </a:pPr>
-            <a:r>
-              <a:rPr lang="en-US" sz="4000" b="1" dirty="0">
-                <a:solidFill>
-                  <a:srgbClr val="FFFFFF"/>
-                </a:solidFill>
-                <a:latin typeface="Open Sans" pitchFamily="34" charset="0"/>
-                <a:ea typeface="Open Sans" pitchFamily="34" charset="-122"/>
-                <a:cs typeface="Open Sans" pitchFamily="34" charset="-120"/>
-              </a:rPr>
-              <a:t>moved online</a:t>
-            </a:r>
-            <a:endParaRPr lang="en-US" sz="4000" dirty="0"/>
-          </a:p>
-        </p:txBody>
-      </p:sp>
-      <p:sp>
-        <p:nvSpPr>
-          <p:cNvPr id="5" name="Shape 3"/>
-          <p:cNvSpPr/>
-          <p:nvPr/>
-        </p:nvSpPr>
-        <p:spPr>
-          <a:xfrm>
-            <a:off x="731520" y="3108960"/>
-            <a:ext cx="1828800" cy="36576"/>
-          </a:xfrm>
-          <a:prstGeom prst="rect">
-            <a:avLst/>
-          </a:prstGeom>
-          <a:solidFill>
-            <a:srgbClr val="B8975C"/>
-          </a:solidFill>
-          <a:ln/>
-        </p:spPr>
-        <p:txBody>
-          <a:bodyPr/>
-          <a:lstStyle/>
-          <a:p>
-            <a:endParaRPr lang="en-US"/>
-          </a:p>
-        </p:txBody>
-      </p:sp>
-      <p:sp>
-        <p:nvSpPr>
-          <p:cNvPr id="6" name="Text 4"/>
-          <p:cNvSpPr/>
-          <p:nvPr/>
-        </p:nvSpPr>
-        <p:spPr>
-          <a:xfrm>
-            <a:off x="731520" y="3337560"/>
-            <a:ext cx="6400800" cy="731520"/>
-          </a:xfrm>
-          <a:prstGeom prst="rect">
-            <a:avLst/>
-          </a:prstGeom>
-          <a:noFill/>
-          <a:ln/>
-        </p:spPr>
-        <p:txBody>
-          <a:bodyPr wrap="square" lIns="0" tIns="0" rIns="0" bIns="0" rtlCol="0" anchor="ctr"/>
-          <a:lstStyle/>
-          <a:p>
-            <a:pPr marL="0" indent="0">
-              <a:lnSpc>
-                <a:spcPct val="140000"/>
-              </a:lnSpc>
-              <a:buNone/>
-            </a:pPr>
-            <a:r>
-              <a:rPr lang="en-US" sz="1400" dirty="0">
-                <a:solidFill>
-                  <a:srgbClr val="8A9BAD"/>
-                </a:solidFill>
-                <a:latin typeface="Open Sans" pitchFamily="34" charset="0"/>
-                <a:ea typeface="Open Sans" pitchFamily="34" charset="-122"/>
-                <a:cs typeface="Open Sans" pitchFamily="34" charset="-120"/>
-              </a:rPr>
-              <a:t>Full walkthrough, cheat sheet, and common fixes now live at</a:t>
-            </a:r>
-            <a:endParaRPr lang="en-US" sz="1400" dirty="0"/>
-          </a:p>
-          <a:p>
-            <a:pPr marL="0" indent="0">
-              <a:lnSpc>
-                <a:spcPct val="140000"/>
-              </a:lnSpc>
-              <a:buNone/>
-            </a:pPr>
-            <a:r>
-              <a:rPr lang="en-US" sz="1400" dirty="0">
-                <a:solidFill>
-                  <a:srgbClr val="8A9BAD"/>
-                </a:solidFill>
-                <a:latin typeface="Open Sans" pitchFamily="34" charset="0"/>
-                <a:ea typeface="Open Sans" pitchFamily="34" charset="-122"/>
-                <a:cs typeface="Open Sans" pitchFamily="34" charset="-120"/>
-              </a:rPr>
-              <a:t>adamwstauffer.github.io/ai-lms  →  Start Here</a:t>
-            </a:r>
-            <a:endParaRPr lang="en-US" sz="1400" dirty="0"/>
-          </a:p>
-        </p:txBody>
-      </p:sp>
-      <p:pic>
-        <p:nvPicPr>
-          <p:cNvPr id="7" name="Image 0" descr="preencoded.png"/>
-          <p:cNvPicPr>
-            <a:picLocks noChangeAspect="1"/>
-          </p:cNvPicPr>
-          <p:nvPr/>
-        </p:nvPicPr>
-        <p:blipFill>
-          <a:blip r:embed="rId3"/>
-          <a:stretch>
-            <a:fillRect/>
-          </a:stretch>
-        </p:blipFill>
-        <p:spPr>
-          <a:xfrm>
-            <a:off x="7132320" y="3200400"/>
-            <a:ext cx="1097280" cy="1097280"/>
-          </a:xfrm>
-          <a:prstGeom prst="rect">
-            <a:avLst/>
-          </a:prstGeom>
-        </p:spPr>
-      </p:pic>
-      <p:sp>
-        <p:nvSpPr>
-          <p:cNvPr id="8" name="Text 5"/>
-          <p:cNvSpPr/>
-          <p:nvPr/>
-        </p:nvSpPr>
-        <p:spPr>
-          <a:xfrm>
-            <a:off x="457200" y="4663440"/>
-            <a:ext cx="8229600" cy="320040"/>
-          </a:xfrm>
-          <a:prstGeom prst="rect">
-            <a:avLst/>
-          </a:prstGeom>
-          <a:noFill/>
-          <a:ln/>
-        </p:spPr>
-        <p:txBody>
-          <a:bodyPr wrap="square" rtlCol="0" anchor="ctr"/>
-          <a:lstStyle/>
-          <a:p>
-            <a:pPr marL="0" indent="0" algn="ctr">
-              <a:buNone/>
-            </a:pPr>
-            <a:r>
-              <a:rPr lang="en-US" sz="1000" dirty="0">
-                <a:solidFill>
-                  <a:srgbClr val="5A6B7A"/>
-                </a:solidFill>
-                <a:latin typeface="Open Sans" pitchFamily="34" charset="0"/>
-                <a:ea typeface="Open Sans" pitchFamily="34" charset="-122"/>
-                <a:cs typeface="Open Sans" pitchFamily="34" charset="-120"/>
-              </a:rPr>
-              <a:t>Stauffer  |  Shidler College of Business  |  University of Hawaiʻi at Mānoa</a:t>
-            </a:r>
-            <a:endParaRPr lang="en-US" sz="1000" dirty="0"/>
-          </a:p>
-        </p:txBody>
-      </p:sp>
-    </p:spTree>
-  </p:cSld>
-  <p:clrMapOvr>
-    <a:masterClrMapping/>
-  </p:clrMapOvr>
-</p:sld>
-</file>
-
 <file path=ppt/slides/slide2.xml><?xml version="1.0" encoding="utf-8"?>
 <p:sld xmlns:a="http://schemas.openxmlformats.org/drawingml/2006/main" xmlns:r="http://schemas.openxmlformats.org/officeDocument/2006/relationships" xmlns:p="http://schemas.openxmlformats.org/presentationml/2006/main">
   <p:cSld name="Slide 2">
@@ -2651,7 +2338,7 @@
                 <a:ea typeface="Open Sans" pitchFamily="34" charset="-122"/>
                 <a:cs typeface="Open Sans" pitchFamily="34" charset="-120"/>
               </a:rPr>
-              <a:t>Use your @hawaii.edu email (gets free GitHub Pro)</a:t>
+              <a:t>Any email works. GitHub Education benefits are optional and never graded.</a:t>
             </a:r>
             <a:endParaRPr lang="en-US" sz="1300" dirty="0"/>
           </a:p>
@@ -3142,7 +2829,7 @@
                   <a:srgbClr val="5A6B7A"/>
                 </a:solidFill>
               </a:rPr>
-              <a:t>education.github.com — free Pro features, Copilot access, and more with your .edu email.
+              <a:t>education.github.com — free Pro features, Copilot access, and more if you add a school address. Optional and never graded.
 </a:t>
             </a:r>
             <a:endParaRPr lang="en-US" sz="1100" dirty="0"/>
@@ -4059,7 +3746,7 @@
                 <a:ea typeface="Consolas" pitchFamily="34" charset="-122"/>
                 <a:cs typeface="Consolas" pitchFamily="34" charset="-120"/>
               </a:rPr>
-              <a:t>git config --global user.email "your@hawaii.edu"</a:t>
+              <a:t>git config --global user.email "you@example.com"</a:t>
             </a:r>
             <a:endParaRPr lang="en-US" sz="1100" dirty="0"/>
           </a:p>
@@ -5000,6 +4687,319 @@
               <a:t>After cloning, run  cd repo-name  to enter the project folder before doing anything else.</a:t>
             </a:r>
             <a:endParaRPr lang="en-US" sz="1100" dirty="0"/>
+          </a:p>
+        </p:txBody>
+      </p:sp>
+    </p:spTree>
+  </p:cSld>
+  <p:clrMapOvr>
+    <a:masterClrMapping/>
+  </p:clrMapOvr>
+</p:sld>
+</file>
+
+<file path=ppt/slides/slide6.xml><?xml version="1.0" encoding="utf-8"?>
+<p:sld xmlns:a="http://schemas.openxmlformats.org/drawingml/2006/main" xmlns:r="http://schemas.openxmlformats.org/officeDocument/2006/relationships" xmlns:p="http://schemas.openxmlformats.org/presentationml/2006/main">
+  <p:cSld name="Slide 1">
+    <p:bg>
+      <p:bgPr>
+        <a:solidFill>
+          <a:srgbClr val="1E2530"/>
+        </a:solidFill>
+        <a:effectLst/>
+      </p:bgPr>
+    </p:bg>
+    <p:spTree>
+      <p:nvGrpSpPr>
+        <p:cNvPr id="1" name=""/>
+        <p:cNvGrpSpPr/>
+        <p:nvPr/>
+      </p:nvGrpSpPr>
+      <p:grpSpPr>
+        <a:xfrm>
+          <a:off x="0" y="0"/>
+          <a:ext cx="0" cy="0"/>
+          <a:chOff x="0" y="0"/>
+          <a:chExt cx="0" cy="0"/>
+        </a:xfrm>
+      </p:grpSpPr>
+      <p:sp>
+        <p:nvSpPr>
+          <p:cNvPr id="2" name="Shape 0"/>
+          <p:cNvSpPr/>
+          <p:nvPr/>
+        </p:nvSpPr>
+        <p:spPr>
+          <a:xfrm>
+            <a:off x="0" y="0"/>
+            <a:ext cx="9144000" cy="36576"/>
+          </a:xfrm>
+          <a:prstGeom prst="rect">
+            <a:avLst/>
+          </a:prstGeom>
+          <a:solidFill>
+            <a:srgbClr val="B8975C"/>
+          </a:solidFill>
+          <a:ln/>
+        </p:spPr>
+        <p:txBody>
+          <a:bodyPr/>
+          <a:lstStyle/>
+          <a:p>
+            <a:endParaRPr lang="en-US"/>
+          </a:p>
+        </p:txBody>
+      </p:sp>
+      <p:sp>
+        <p:nvSpPr>
+          <p:cNvPr id="3" name="Text 1"/>
+          <p:cNvSpPr/>
+          <p:nvPr/>
+        </p:nvSpPr>
+        <p:spPr>
+          <a:xfrm>
+            <a:off x="731520" y="548640"/>
+            <a:ext cx="7680960" cy="365760"/>
+          </a:xfrm>
+          <a:prstGeom prst="rect">
+            <a:avLst/>
+          </a:prstGeom>
+          <a:noFill/>
+          <a:ln/>
+        </p:spPr>
+        <p:txBody>
+          <a:bodyPr wrap="square" lIns="0" tIns="0" rIns="0" bIns="0" rtlCol="0" anchor="ctr"/>
+          <a:lstStyle/>
+          <a:p>
+            <a:pPr marL="0" indent="0">
+              <a:buNone/>
+            </a:pPr>
+            <a:r>
+              <a:rPr lang="en-US" sz="1400" b="1" kern="0" spc="600" dirty="0">
+                <a:solidFill>
+                  <a:srgbClr val="B8975C"/>
+                </a:solidFill>
+                <a:latin typeface="Open Sans" pitchFamily="34" charset="0"/>
+                <a:ea typeface="Open Sans" pitchFamily="34" charset="-122"/>
+                <a:cs typeface="Open Sans" pitchFamily="34" charset="-120"/>
+              </a:rPr>
+              <a:t>STEP 4 OF 4</a:t>
+            </a:r>
+            <a:endParaRPr lang="en-US" sz="1400" dirty="0"/>
+          </a:p>
+        </p:txBody>
+      </p:sp>
+      <p:sp>
+        <p:nvSpPr>
+          <p:cNvPr id="4" name="Text 2"/>
+          <p:cNvSpPr/>
+          <p:nvPr/>
+        </p:nvSpPr>
+        <p:spPr>
+          <a:xfrm>
+            <a:off x="731520" y="1097280"/>
+            <a:ext cx="7680960" cy="1828800"/>
+          </a:xfrm>
+          <a:prstGeom prst="rect">
+            <a:avLst/>
+          </a:prstGeom>
+          <a:noFill/>
+          <a:ln/>
+        </p:spPr>
+        <p:txBody>
+          <a:bodyPr wrap="square" lIns="0" tIns="0" rIns="0" bIns="0" rtlCol="0" anchor="ctr"/>
+          <a:lstStyle/>
+          <a:p>
+            <a:pPr marL="0" indent="0">
+              <a:lnSpc>
+                <a:spcPct val="110000"/>
+              </a:lnSpc>
+              <a:buNone/>
+            </a:pPr>
+            <a:r>
+              <a:rPr lang="en-US" sz="4000" b="1" dirty="0">
+                <a:solidFill>
+                  <a:srgbClr val="FFFFFF"/>
+                </a:solidFill>
+                <a:latin typeface="Open Sans" pitchFamily="34" charset="0"/>
+                <a:ea typeface="Open Sans" pitchFamily="34" charset="-122"/>
+                <a:cs typeface="Open Sans" pitchFamily="34" charset="-120"/>
+              </a:rPr>
+              <a:t>GitHub setup</a:t>
+            </a:r>
+            <a:endParaRPr lang="en-US" sz="4000" dirty="0"/>
+          </a:p>
+          <a:p>
+            <a:pPr marL="0" indent="0">
+              <a:lnSpc>
+                <a:spcPct val="110000"/>
+              </a:lnSpc>
+              <a:buNone/>
+            </a:pPr>
+            <a:r>
+              <a:rPr lang="en-US" sz="4000" b="1" dirty="0">
+                <a:solidFill>
+                  <a:srgbClr val="FFFFFF"/>
+                </a:solidFill>
+                <a:latin typeface="Open Sans" pitchFamily="34" charset="0"/>
+                <a:ea typeface="Open Sans" pitchFamily="34" charset="-122"/>
+                <a:cs typeface="Open Sans" pitchFamily="34" charset="-120"/>
+              </a:rPr>
+              <a:t>moved online</a:t>
+            </a:r>
+            <a:endParaRPr lang="en-US" sz="4000" dirty="0"/>
+          </a:p>
+        </p:txBody>
+      </p:sp>
+      <p:sp>
+        <p:nvSpPr>
+          <p:cNvPr id="5" name="Shape 3"/>
+          <p:cNvSpPr/>
+          <p:nvPr/>
+        </p:nvSpPr>
+        <p:spPr>
+          <a:xfrm>
+            <a:off x="731520" y="3108960"/>
+            <a:ext cx="1828800" cy="36576"/>
+          </a:xfrm>
+          <a:prstGeom prst="rect">
+            <a:avLst/>
+          </a:prstGeom>
+          <a:solidFill>
+            <a:srgbClr val="B8975C"/>
+          </a:solidFill>
+          <a:ln/>
+        </p:spPr>
+        <p:txBody>
+          <a:bodyPr/>
+          <a:lstStyle/>
+          <a:p>
+            <a:endParaRPr lang="en-US"/>
+          </a:p>
+        </p:txBody>
+      </p:sp>
+      <p:sp>
+        <p:nvSpPr>
+          <p:cNvPr id="6" name="Text 4"/>
+          <p:cNvSpPr/>
+          <p:nvPr/>
+        </p:nvSpPr>
+        <p:spPr>
+          <a:xfrm>
+            <a:off x="731520" y="3337560"/>
+            <a:ext cx="6400800" cy="731520"/>
+          </a:xfrm>
+          <a:prstGeom prst="rect">
+            <a:avLst/>
+          </a:prstGeom>
+          <a:noFill/>
+          <a:ln/>
+        </p:spPr>
+        <p:txBody>
+          <a:bodyPr wrap="square" lIns="0" tIns="0" rIns="0" bIns="0" rtlCol="0" anchor="ctr"/>
+          <a:lstStyle/>
+          <a:p>
+            <a:pPr marL="0" indent="0">
+              <a:lnSpc>
+                <a:spcPct val="140000"/>
+              </a:lnSpc>
+              <a:buNone/>
+            </a:pPr>
+            <a:r>
+              <a:rPr lang="en-US" sz="1400" dirty="0">
+                <a:solidFill>
+                  <a:srgbClr val="8A9BAD"/>
+                </a:solidFill>
+                <a:latin typeface="Open Sans" pitchFamily="34" charset="0"/>
+                <a:ea typeface="Open Sans" pitchFamily="34" charset="-122"/>
+                <a:cs typeface="Open Sans" pitchFamily="34" charset="-120"/>
+              </a:rPr>
+              <a:t>Full walkthrough, cheat sheet, and common fixes now live at</a:t>
+            </a:r>
+            <a:endParaRPr lang="en-US" sz="1400" dirty="0"/>
+          </a:p>
+          <a:p>
+            <a:pPr marL="0" indent="0">
+              <a:lnSpc>
+                <a:spcPct val="140000"/>
+              </a:lnSpc>
+              <a:buNone/>
+            </a:pPr>
+            <a:r>
+              <a:rPr lang="en-US" sz="1400" dirty="0">
+                <a:solidFill>
+                  <a:srgbClr val="8A9BAD"/>
+                </a:solidFill>
+                <a:latin typeface="Open Sans" pitchFamily="34" charset="0"/>
+                <a:ea typeface="Open Sans" pitchFamily="34" charset="-122"/>
+                <a:cs typeface="Open Sans" pitchFamily="34" charset="-120"/>
+              </a:rPr>
+              <a:t>adamwstauffer.github.io/ai-lms  →  Start Here</a:t>
+            </a:r>
+            <a:endParaRPr lang="en-US" sz="1400" dirty="0"/>
+          </a:p>
+        </p:txBody>
+      </p:sp>
+      <p:pic>
+        <p:nvPicPr>
+          <p:cNvPr id="7" name="Image 0" descr="preencoded.png"/>
+          <p:cNvPicPr>
+            <a:picLocks noChangeAspect="1"/>
+          </p:cNvPicPr>
+          <p:nvPr/>
+        </p:nvPicPr>
+        <p:blipFill>
+          <a:blip r:embed="rId3"/>
+          <a:stretch>
+            <a:fillRect/>
+          </a:stretch>
+        </p:blipFill>
+        <p:spPr>
+          <a:xfrm>
+            <a:off x="7132320" y="3200400"/>
+            <a:ext cx="1097280" cy="1097280"/>
+          </a:xfrm>
+          <a:prstGeom prst="rect">
+            <a:avLst/>
+          </a:prstGeom>
+        </p:spPr>
+      </p:pic>
+      <p:sp>
+        <p:nvSpPr>
+          <p:cNvPr id="8" name="Text 5"/>
+          <p:cNvSpPr/>
+          <p:nvPr/>
+        </p:nvSpPr>
+        <p:spPr>
+          <a:xfrm>
+            <a:off x="457200" y="4663440"/>
+            <a:ext cx="8229600" cy="320040"/>
+          </a:xfrm>
+          <a:prstGeom prst="rect">
+            <a:avLst/>
+          </a:prstGeom>
+          <a:noFill/>
+          <a:ln/>
+        </p:spPr>
+        <p:txBody>
+          <a:bodyPr wrap="square" rtlCol="0" anchor="ctr"/>
+          <a:lstStyle/>
+          <a:p>
+            <a:pPr marL="0" indent="0" algn="ctr">
+              <a:buNone/>
+            </a:pPr>
+            <a:r>
+              <a:rPr lang="en-US" sz="1000" dirty="0">
+                <a:solidFill>
+                  <a:srgbClr val="5A6B7A"/>
+                </a:solidFill>
+                <a:latin typeface="Open Sans" pitchFamily="34" charset="0"/>
+                <a:ea typeface="Open Sans" pitchFamily="34" charset="-122"/>
+                <a:cs typeface="Open Sans" pitchFamily="34" charset="-120"/>
+              </a:rPr>
+              <a:t>Stauffer  |  Shidler College of Business  |  University of Hawaiʻi at Mānoa</a:t>
+            </a:r>
+            <a:endParaRPr lang="en-US" sz="1000" dirty="0"/>
           </a:p>
         </p:txBody>
       </p:sp>
